--- a/tmp-tj/261028_DreamCosmetics_campagne-influence-CI_v1.pptx
+++ b/tmp-tj/261028_DreamCosmetics_campagne-influence-CI_v1.pptx
@@ -3294,7 +3294,7 @@
         <p:spPr>
           <a:xfrm>
             <a:off x="648000" y="2232000"/>
-            <a:ext cx="5040000" cy="1620000"/>
+            <a:ext cx="5220000" cy="936000"/>
           </a:xfrm>
           <a:prstGeom prst="rect">
             <a:avLst/>
@@ -3313,7 +3313,7 @@
               </a:lnSpc>
             </a:pPr>
             <a:r>
-              <a:rPr sz="4400" b="1">
+              <a:rPr sz="3600" b="1">
                 <a:solidFill>
                   <a:srgbClr val="FFFFFF"/>
                 </a:solidFill>
@@ -16042,7 +16042,7 @@
                           </a:solidFill>
                           <a:latin typeface="Poppins"/>
                         </a:rPr>
-                        <a:t>Droits et règles communs à tous</a:t>
+                        <a:t>Règles communes</a:t>
                       </a:r>
                     </a:p>
                   </a:txBody>
@@ -16057,14 +16057,16 @@
                     <a:bodyPr/>
                     <a:lstStyle/>
                     <a:p>
-                      <a:pPr algn="ctr">
-                        <a:defRPr sz="1100" b="1">
+                      <a:pPr algn="ctr"/>
+                      <a:r>
+                        <a:rPr sz="1100" b="1">
                           <a:solidFill>
                             <a:srgbClr val="FFFFFF"/>
                           </a:solidFill>
                           <a:latin typeface="Poppins"/>
-                        </a:defRPr>
-                      </a:pPr>
+                        </a:rPr>
+                        <a:t>Pour tous les créateurs</a:t>
+                      </a:r>
                     </a:p>
                   </a:txBody>
                   <a:tcPr marL="72000" marR="72000" anchor="ctr">
@@ -21050,7 +21052,7 @@
       <p:grpSpPr/>
       <p:pic>
         <p:nvPicPr>
-          <p:cNvPr id="2" name="Picture 1" descr="hero_dbd.jpg"/>
+          <p:cNvPr id="2" name="Picture 1" descr="dbd.jpg"/>
           <p:cNvPicPr>
             <a:picLocks noChangeAspect="1"/>
           </p:cNvPicPr>
@@ -21058,15 +21060,15 @@
         </p:nvPicPr>
         <p:blipFill>
           <a:blip r:embed="rId2"/>
-          <a:srcRect t="9879" b="23051"/>
+          <a:srcRect t="248" b="578"/>
           <a:stretch>
             <a:fillRect/>
           </a:stretch>
         </p:blipFill>
         <p:spPr>
           <a:xfrm>
-            <a:off x="0" y="0"/>
-            <a:ext cx="12192119" cy="6858000"/>
+            <a:off x="6660000" y="0"/>
+            <a:ext cx="5532119" cy="6858000"/>
           </a:xfrm>
           <a:prstGeom prst="rect">
             <a:avLst/>
@@ -26893,8 +26895,8 @@
         </p:nvSpPr>
         <p:spPr>
           <a:xfrm>
-            <a:off x="3060000" y="1692000"/>
-            <a:ext cx="3240000" cy="1296000"/>
+            <a:off x="3060000" y="1620000"/>
+            <a:ext cx="3240000" cy="1260000"/>
           </a:xfrm>
           <a:prstGeom prst="roundRect">
             <a:avLst>
@@ -26939,8 +26941,8 @@
         </p:nvSpPr>
         <p:spPr>
           <a:xfrm>
-            <a:off x="3060000" y="1692000"/>
-            <a:ext cx="3240000" cy="1296000"/>
+            <a:off x="3060000" y="1620000"/>
+            <a:ext cx="3240000" cy="1260000"/>
           </a:xfrm>
           <a:prstGeom prst="rect">
             <a:avLst/>
@@ -26997,7 +26999,7 @@
         </p:nvSpPr>
         <p:spPr>
           <a:xfrm>
-            <a:off x="8712000" y="1872000"/>
+            <a:off x="8712000" y="1800000"/>
             <a:ext cx="2951999" cy="1080000"/>
           </a:xfrm>
           <a:prstGeom prst="rect">
@@ -27036,8 +27038,8 @@
         </p:nvSpPr>
         <p:spPr>
           <a:xfrm>
-            <a:off x="1980000" y="3167999"/>
-            <a:ext cx="5400000" cy="1296000"/>
+            <a:off x="1980000" y="3060000"/>
+            <a:ext cx="5400000" cy="1260000"/>
           </a:xfrm>
           <a:prstGeom prst="roundRect">
             <a:avLst>
@@ -27082,8 +27084,8 @@
         </p:nvSpPr>
         <p:spPr>
           <a:xfrm>
-            <a:off x="1980000" y="3167999"/>
-            <a:ext cx="5400000" cy="1296000"/>
+            <a:off x="1980000" y="3060000"/>
+            <a:ext cx="5400000" cy="1260000"/>
           </a:xfrm>
           <a:prstGeom prst="rect">
             <a:avLst/>
@@ -27140,7 +27142,7 @@
         </p:nvSpPr>
         <p:spPr>
           <a:xfrm>
-            <a:off x="8712000" y="3347999"/>
+            <a:off x="8712000" y="3240000"/>
             <a:ext cx="2951999" cy="1080000"/>
           </a:xfrm>
           <a:prstGeom prst="rect">
@@ -27179,8 +27181,8 @@
         </p:nvSpPr>
         <p:spPr>
           <a:xfrm>
-            <a:off x="900000" y="4643998"/>
-            <a:ext cx="7560000" cy="1296000"/>
+            <a:off x="900000" y="4500000"/>
+            <a:ext cx="7560000" cy="1260000"/>
           </a:xfrm>
           <a:prstGeom prst="roundRect">
             <a:avLst>
@@ -27225,8 +27227,8 @@
         </p:nvSpPr>
         <p:spPr>
           <a:xfrm>
-            <a:off x="900000" y="4643998"/>
-            <a:ext cx="7560000" cy="1296000"/>
+            <a:off x="900000" y="4500000"/>
+            <a:ext cx="7560000" cy="1260000"/>
           </a:xfrm>
           <a:prstGeom prst="rect">
             <a:avLst/>
@@ -27283,7 +27285,7 @@
         </p:nvSpPr>
         <p:spPr>
           <a:xfrm>
-            <a:off x="8712000" y="4823998"/>
+            <a:off x="8712000" y="4680000"/>
             <a:ext cx="2951999" cy="1080000"/>
           </a:xfrm>
           <a:prstGeom prst="rect">
@@ -27322,7 +27324,7 @@
         </p:nvSpPr>
         <p:spPr>
           <a:xfrm>
-            <a:off x="576000" y="6084000"/>
+            <a:off x="576000" y="6030000"/>
             <a:ext cx="11052000" cy="396000"/>
           </a:xfrm>
           <a:prstGeom prst="roundRect">
@@ -27368,7 +27370,7 @@
         </p:nvSpPr>
         <p:spPr>
           <a:xfrm>
-            <a:off x="720000" y="6083999"/>
+            <a:off x="720000" y="6030000"/>
             <a:ext cx="10800000" cy="396000"/>
           </a:xfrm>
           <a:prstGeom prst="rect">
